--- a/docs/roadmap-pptx/Korean_Bible_App_Roadmap_및_작업제안_2026-07-04.pptx
+++ b/docs/roadmap-pptx/Korean_Bible_App_Roadmap_및_작업제안_2026-07-04.pptx
@@ -3508,581 +3508,14 @@
               </a:defRPr>
             </a:pPr>
             <a:r>
-              <a:t>1. Phase 4 잔여: 추가 Semantics + Hymn CSV 100곡+ import</a:t>
-            </a:r>
-          </a:p>
-        </p:txBody>
-      </p:sp>
-      <p:sp>
-        <p:nvSpPr>
-          <p:cNvPr id="7" name="Rounded Rectangle 6"/>
-          <p:cNvSpPr/>
-          <p:nvPr/>
-        </p:nvSpPr>
-        <p:spPr>
-          <a:xfrm>
-            <a:off x="457200" y="1325880"/>
-            <a:ext cx="8229600" cy="384048"/>
-          </a:xfrm>
-          <a:prstGeom prst="roundRect">
-            <a:avLst/>
-          </a:prstGeom>
-          <a:solidFill>
-            <a:srgbClr val="FFFFFF"/>
-          </a:solidFill>
-          <a:ln>
-            <a:solidFill>
-              <a:srgbClr val="E2E8F0"/>
-            </a:solidFill>
-          </a:ln>
-        </p:spPr>
-        <p:style>
-          <a:lnRef idx="1">
-            <a:schemeClr val="accent1"/>
-          </a:lnRef>
-          <a:fillRef idx="3">
-            <a:schemeClr val="accent1"/>
-          </a:fillRef>
-          <a:effectRef idx="2">
-            <a:schemeClr val="accent1"/>
-          </a:effectRef>
-          <a:fontRef idx="minor">
-            <a:schemeClr val="lt1"/>
-          </a:fontRef>
-        </p:style>
-        <p:txBody>
-          <a:bodyPr rtlCol="0" anchor="ctr"/>
-          <a:lstStyle/>
-          <a:p>
-            <a:pPr algn="ctr"/>
-          </a:p>
-        </p:txBody>
-      </p:sp>
-      <p:sp>
-        <p:nvSpPr>
-          <p:cNvPr id="8" name="TextBox 7"/>
-          <p:cNvSpPr txBox="1"/>
-          <p:nvPr/>
-        </p:nvSpPr>
-        <p:spPr>
-          <a:xfrm>
-            <a:off x="640080" y="1371600"/>
-            <a:ext cx="7863840" cy="320040"/>
-          </a:xfrm>
-          <a:prstGeom prst="rect">
-            <a:avLst/>
-          </a:prstGeom>
-          <a:noFill/>
-        </p:spPr>
-        <p:txBody>
-          <a:bodyPr wrap="square">
-            <a:spAutoFit/>
-          </a:bodyPr>
-          <a:lstStyle/>
-          <a:p>
-            <a:pPr algn="l">
-              <a:defRPr sz="1200" b="0">
-                <a:solidFill>
-                  <a:srgbClr val="1E293B"/>
-                </a:solidFill>
-                <a:latin typeface="Malgun Gothic"/>
-              </a:defRPr>
-            </a:pPr>
-            <a:r>
-              <a:t>2. Phase 5 Day1-2: Android 빌드 + emulator 테스트 + signing</a:t>
-            </a:r>
-          </a:p>
-        </p:txBody>
-      </p:sp>
-      <p:sp>
-        <p:nvSpPr>
-          <p:cNvPr id="9" name="Rounded Rectangle 8"/>
-          <p:cNvSpPr/>
-          <p:nvPr/>
-        </p:nvSpPr>
-        <p:spPr>
-          <a:xfrm>
-            <a:off x="457200" y="1783080"/>
-            <a:ext cx="8229600" cy="384048"/>
-          </a:xfrm>
-          <a:prstGeom prst="roundRect">
-            <a:avLst/>
-          </a:prstGeom>
-          <a:solidFill>
-            <a:srgbClr val="FFFFFF"/>
-          </a:solidFill>
-          <a:ln>
-            <a:solidFill>
-              <a:srgbClr val="E2E8F0"/>
-            </a:solidFill>
-          </a:ln>
-        </p:spPr>
-        <p:style>
-          <a:lnRef idx="1">
-            <a:schemeClr val="accent1"/>
-          </a:lnRef>
-          <a:fillRef idx="3">
-            <a:schemeClr val="accent1"/>
-          </a:fillRef>
-          <a:effectRef idx="2">
-            <a:schemeClr val="accent1"/>
-          </a:effectRef>
-          <a:fontRef idx="minor">
-            <a:schemeClr val="lt1"/>
-          </a:fontRef>
-        </p:style>
-        <p:txBody>
-          <a:bodyPr rtlCol="0" anchor="ctr"/>
-          <a:lstStyle/>
-          <a:p>
-            <a:pPr algn="ctr"/>
-          </a:p>
-        </p:txBody>
-      </p:sp>
-      <p:sp>
-        <p:nvSpPr>
-          <p:cNvPr id="10" name="TextBox 9"/>
-          <p:cNvSpPr txBox="1"/>
-          <p:nvPr/>
-        </p:nvSpPr>
-        <p:spPr>
-          <a:xfrm>
-            <a:off x="640080" y="1828800"/>
-            <a:ext cx="7863840" cy="320040"/>
-          </a:xfrm>
-          <a:prstGeom prst="rect">
-            <a:avLst/>
-          </a:prstGeom>
-          <a:noFill/>
-        </p:spPr>
-        <p:txBody>
-          <a:bodyPr wrap="square">
-            <a:spAutoFit/>
-          </a:bodyPr>
-          <a:lstStyle/>
-          <a:p>
-            <a:pPr algn="l">
-              <a:defRPr sz="1200" b="0">
-                <a:solidFill>
-                  <a:srgbClr val="1E293B"/>
-                </a:solidFill>
-                <a:latin typeface="Malgun Gothic"/>
-              </a:defRPr>
-            </a:pPr>
-            <a:r>
-              <a:t>3. Phase 5 Day2-4: iOS build/archive + Web PWA deploy test</a:t>
-            </a:r>
-          </a:p>
-        </p:txBody>
-      </p:sp>
-      <p:sp>
-        <p:nvSpPr>
-          <p:cNvPr id="11" name="Rounded Rectangle 10"/>
-          <p:cNvSpPr/>
-          <p:nvPr/>
-        </p:nvSpPr>
-        <p:spPr>
-          <a:xfrm>
-            <a:off x="457200" y="2240280"/>
-            <a:ext cx="8229600" cy="384048"/>
-          </a:xfrm>
-          <a:prstGeom prst="roundRect">
-            <a:avLst/>
-          </a:prstGeom>
-          <a:solidFill>
-            <a:srgbClr val="FFFFFF"/>
-          </a:solidFill>
-          <a:ln>
-            <a:solidFill>
-              <a:srgbClr val="E2E8F0"/>
-            </a:solidFill>
-          </a:ln>
-        </p:spPr>
-        <p:style>
-          <a:lnRef idx="1">
-            <a:schemeClr val="accent1"/>
-          </a:lnRef>
-          <a:fillRef idx="3">
-            <a:schemeClr val="accent1"/>
-          </a:fillRef>
-          <a:effectRef idx="2">
-            <a:schemeClr val="accent1"/>
-          </a:effectRef>
-          <a:fontRef idx="minor">
-            <a:schemeClr val="lt1"/>
-          </a:fontRef>
-        </p:style>
-        <p:txBody>
-          <a:bodyPr rtlCol="0" anchor="ctr"/>
-          <a:lstStyle/>
-          <a:p>
-            <a:pPr algn="ctr"/>
-          </a:p>
-        </p:txBody>
-      </p:sp>
-      <p:sp>
-        <p:nvSpPr>
-          <p:cNvPr id="12" name="TextBox 11"/>
-          <p:cNvSpPr txBox="1"/>
-          <p:nvPr/>
-        </p:nvSpPr>
-        <p:spPr>
-          <a:xfrm>
-            <a:off x="640080" y="2286000"/>
-            <a:ext cx="7863840" cy="320040"/>
-          </a:xfrm>
-          <a:prstGeom prst="rect">
-            <a:avLst/>
-          </a:prstGeom>
-          <a:noFill/>
-        </p:spPr>
-        <p:txBody>
-          <a:bodyPr wrap="square">
-            <a:spAutoFit/>
-          </a:bodyPr>
-          <a:lstStyle/>
-          <a:p>
-            <a:pPr algn="l">
-              <a:defRPr sz="1200" b="0">
-                <a:solidFill>
-                  <a:srgbClr val="1E293B"/>
-                </a:solidFill>
-                <a:latin typeface="Malgun Gothic"/>
-              </a:defRPr>
-            </a:pPr>
-            <a:r>
-              <a:t>4. Store assets: 스크린샷 (다양한 기기) + listing text</a:t>
-            </a:r>
-          </a:p>
-        </p:txBody>
-      </p:sp>
-      <p:sp>
-        <p:nvSpPr>
-          <p:cNvPr id="13" name="Rounded Rectangle 12"/>
-          <p:cNvSpPr/>
-          <p:nvPr/>
-        </p:nvSpPr>
-        <p:spPr>
-          <a:xfrm>
-            <a:off x="457200" y="2697480"/>
-            <a:ext cx="8229600" cy="384048"/>
-          </a:xfrm>
-          <a:prstGeom prst="roundRect">
-            <a:avLst/>
-          </a:prstGeom>
-          <a:solidFill>
-            <a:srgbClr val="FFFFFF"/>
-          </a:solidFill>
-          <a:ln>
-            <a:solidFill>
-              <a:srgbClr val="E2E8F0"/>
-            </a:solidFill>
-          </a:ln>
-        </p:spPr>
-        <p:style>
-          <a:lnRef idx="1">
-            <a:schemeClr val="accent1"/>
-          </a:lnRef>
-          <a:fillRef idx="3">
-            <a:schemeClr val="accent1"/>
-          </a:fillRef>
-          <a:effectRef idx="2">
-            <a:schemeClr val="accent1"/>
-          </a:effectRef>
-          <a:fontRef idx="minor">
-            <a:schemeClr val="lt1"/>
-          </a:fontRef>
-        </p:style>
-        <p:txBody>
-          <a:bodyPr rtlCol="0" anchor="ctr"/>
-          <a:lstStyle/>
-          <a:p>
-            <a:pPr algn="ctr"/>
-          </a:p>
-        </p:txBody>
-      </p:sp>
-      <p:sp>
-        <p:nvSpPr>
-          <p:cNvPr id="14" name="TextBox 13"/>
-          <p:cNvSpPr txBox="1"/>
-          <p:nvPr/>
-        </p:nvSpPr>
-        <p:spPr>
-          <a:xfrm>
-            <a:off x="640080" y="2743200"/>
-            <a:ext cx="7863840" cy="320040"/>
-          </a:xfrm>
-          <a:prstGeom prst="rect">
-            <a:avLst/>
-          </a:prstGeom>
-          <a:noFill/>
-        </p:spPr>
-        <p:txBody>
-          <a:bodyPr wrap="square">
-            <a:spAutoFit/>
-          </a:bodyPr>
-          <a:lstStyle/>
-          <a:p>
-            <a:pPr algn="l">
-              <a:defRPr sz="1200" b="0">
-                <a:solidFill>
-                  <a:srgbClr val="1E293B"/>
-                </a:solidFill>
-                <a:latin typeface="Malgun Gothic"/>
-              </a:defRPr>
-            </a:pPr>
-            <a:r>
-              <a:t>5. Final polish: 남은 화면 responsive + accessibility audit</a:t>
-            </a:r>
-          </a:p>
-        </p:txBody>
-      </p:sp>
-      <p:sp>
-        <p:nvSpPr>
-          <p:cNvPr id="15" name="Rounded Rectangle 14"/>
-          <p:cNvSpPr/>
-          <p:nvPr/>
-        </p:nvSpPr>
-        <p:spPr>
-          <a:xfrm>
-            <a:off x="457200" y="3154680"/>
-            <a:ext cx="8229600" cy="384048"/>
-          </a:xfrm>
-          <a:prstGeom prst="roundRect">
-            <a:avLst/>
-          </a:prstGeom>
-          <a:solidFill>
-            <a:srgbClr val="FFFFFF"/>
-          </a:solidFill>
-          <a:ln>
-            <a:solidFill>
-              <a:srgbClr val="E2E8F0"/>
-            </a:solidFill>
-          </a:ln>
-        </p:spPr>
-        <p:style>
-          <a:lnRef idx="1">
-            <a:schemeClr val="accent1"/>
-          </a:lnRef>
-          <a:fillRef idx="3">
-            <a:schemeClr val="accent1"/>
-          </a:fillRef>
-          <a:effectRef idx="2">
-            <a:schemeClr val="accent1"/>
-          </a:effectRef>
-          <a:fontRef idx="minor">
-            <a:schemeClr val="lt1"/>
-          </a:fontRef>
-        </p:style>
-        <p:txBody>
-          <a:bodyPr rtlCol="0" anchor="ctr"/>
-          <a:lstStyle/>
-          <a:p>
-            <a:pPr algn="ctr"/>
-          </a:p>
-        </p:txBody>
-      </p:sp>
-      <p:sp>
-        <p:nvSpPr>
-          <p:cNvPr id="16" name="TextBox 15"/>
-          <p:cNvSpPr txBox="1"/>
-          <p:nvPr/>
-        </p:nvSpPr>
-        <p:spPr>
-          <a:xfrm>
-            <a:off x="640080" y="3200400"/>
-            <a:ext cx="7863840" cy="320040"/>
-          </a:xfrm>
-          <a:prstGeom prst="rect">
-            <a:avLst/>
-          </a:prstGeom>
-          <a:noFill/>
-        </p:spPr>
-        <p:txBody>
-          <a:bodyPr wrap="square">
-            <a:spAutoFit/>
-          </a:bodyPr>
-          <a:lstStyle/>
-          <a:p>
-            <a:pPr algn="l">
-              <a:defRPr sz="1200" b="0">
-                <a:solidFill>
-                  <a:srgbClr val="1E293B"/>
-                </a:solidFill>
-                <a:latin typeface="Malgun Gothic"/>
-              </a:defRPr>
-            </a:pPr>
-            <a:r>
-              <a:t>6. Full test coverage + performance check (large JSON)</a:t>
-            </a:r>
-          </a:p>
-        </p:txBody>
-      </p:sp>
-      <p:sp>
-        <p:nvSpPr>
-          <p:cNvPr id="17" name="Rounded Rectangle 16"/>
-          <p:cNvSpPr/>
-          <p:nvPr/>
-        </p:nvSpPr>
-        <p:spPr>
-          <a:xfrm>
-            <a:off x="457200" y="3611880"/>
-            <a:ext cx="8229600" cy="384048"/>
-          </a:xfrm>
-          <a:prstGeom prst="roundRect">
-            <a:avLst/>
-          </a:prstGeom>
-          <a:solidFill>
-            <a:srgbClr val="FFFFFF"/>
-          </a:solidFill>
-          <a:ln>
-            <a:solidFill>
-              <a:srgbClr val="E2E8F0"/>
-            </a:solidFill>
-          </a:ln>
-        </p:spPr>
-        <p:style>
-          <a:lnRef idx="1">
-            <a:schemeClr val="accent1"/>
-          </a:lnRef>
-          <a:fillRef idx="3">
-            <a:schemeClr val="accent1"/>
-          </a:fillRef>
-          <a:effectRef idx="2">
-            <a:schemeClr val="accent1"/>
-          </a:effectRef>
-          <a:fontRef idx="minor">
-            <a:schemeClr val="lt1"/>
-          </a:fontRef>
-        </p:style>
-        <p:txBody>
-          <a:bodyPr rtlCol="0" anchor="ctr"/>
-          <a:lstStyle/>
-          <a:p>
-            <a:pPr algn="ctr"/>
-          </a:p>
-        </p:txBody>
-      </p:sp>
-      <p:sp>
-        <p:nvSpPr>
-          <p:cNvPr id="18" name="TextBox 17"/>
-          <p:cNvSpPr txBox="1"/>
-          <p:nvPr/>
-        </p:nvSpPr>
-        <p:spPr>
-          <a:xfrm>
-            <a:off x="640080" y="3657600"/>
-            <a:ext cx="7863840" cy="320040"/>
-          </a:xfrm>
-          <a:prstGeom prst="rect">
-            <a:avLst/>
-          </a:prstGeom>
-          <a:noFill/>
-        </p:spPr>
-        <p:txBody>
-          <a:bodyPr wrap="square">
-            <a:spAutoFit/>
-          </a:bodyPr>
-          <a:lstStyle/>
-          <a:p>
-            <a:pPr algn="l">
-              <a:defRPr sz="1200" b="0">
-                <a:solidFill>
-                  <a:srgbClr val="1E293B"/>
-                </a:solidFill>
-                <a:latin typeface="Malgun Gothic"/>
-              </a:defRPr>
-            </a:pPr>
-            <a:r>
-              <a:t>7. Internal release + feedback cycle</a:t>
-            </a:r>
-          </a:p>
-        </p:txBody>
-      </p:sp>
-      <p:sp>
-        <p:nvSpPr>
-          <p:cNvPr id="19" name="Rounded Rectangle 18"/>
-          <p:cNvSpPr/>
-          <p:nvPr/>
-        </p:nvSpPr>
-        <p:spPr>
-          <a:xfrm>
-            <a:off x="457200" y="4069080"/>
-            <a:ext cx="8229600" cy="384048"/>
-          </a:xfrm>
-          <a:prstGeom prst="roundRect">
-            <a:avLst/>
-          </a:prstGeom>
-          <a:solidFill>
-            <a:srgbClr val="FFFFFF"/>
-          </a:solidFill>
-          <a:ln>
-            <a:solidFill>
-              <a:srgbClr val="E2E8F0"/>
-            </a:solidFill>
-          </a:ln>
-        </p:spPr>
-        <p:style>
-          <a:lnRef idx="1">
-            <a:schemeClr val="accent1"/>
-          </a:lnRef>
-          <a:fillRef idx="3">
-            <a:schemeClr val="accent1"/>
-          </a:fillRef>
-          <a:effectRef idx="2">
-            <a:schemeClr val="accent1"/>
-          </a:effectRef>
-          <a:fontRef idx="minor">
-            <a:schemeClr val="lt1"/>
-          </a:fontRef>
-        </p:style>
-        <p:txBody>
-          <a:bodyPr rtlCol="0" anchor="ctr"/>
-          <a:lstStyle/>
-          <a:p>
-            <a:pPr algn="ctr"/>
-          </a:p>
-        </p:txBody>
-      </p:sp>
-      <p:sp>
-        <p:nvSpPr>
-          <p:cNvPr id="20" name="TextBox 19"/>
-          <p:cNvSpPr txBox="1"/>
-          <p:nvPr/>
-        </p:nvSpPr>
-        <p:spPr>
-          <a:xfrm>
-            <a:off x="640080" y="4114800"/>
-            <a:ext cx="7863840" cy="320040"/>
-          </a:xfrm>
-          <a:prstGeom prst="rect">
-            <a:avLst/>
-          </a:prstGeom>
-          <a:noFill/>
-        </p:spPr>
-        <p:txBody>
-          <a:bodyPr wrap="square">
-            <a:spAutoFit/>
-          </a:bodyPr>
-          <a:lstStyle/>
-          <a:p>
-            <a:pPr algn="l">
-              <a:defRPr sz="1200" b="0">
-                <a:solidFill>
-                  <a:srgbClr val="1E293B"/>
-                </a:solidFill>
-                <a:latin typeface="Malgun Gothic"/>
-              </a:defRPr>
-            </a:pPr>
-            <a:r>
-              <a:t>8. 스토어 제출 준비 (Play / App Store / MS Store)</a:t>
-            </a:r>
-          </a:p>
-        </p:txBody>
-      </p:sp>
-      <p:sp>
-        <p:nvSpPr>
-          <p:cNvPr id="21" name="TextBox 20"/>
+              <a:t>1. 전체 대비 남은 ~15% (주로 Phase 5 + Phase 4 잔여)**</a:t>
+            </a:r>
+          </a:p>
+        </p:txBody>
+      </p:sp>
+      <p:sp>
+        <p:nvSpPr>
+          <p:cNvPr id="7" name="TextBox 6"/>
           <p:cNvSpPr txBox="1"/>
           <p:nvPr/>
         </p:nvSpPr>
@@ -4503,7 +3936,7 @@
               </a:defRPr>
             </a:pPr>
             <a:r>
-              <a:t>1. 데이터 모델 + Hive 어댑터 (Phase 1)</a:t>
+              <a:t>1. Phase 5 Android: build + emulator/실기기 test + signing</a:t>
             </a:r>
           </a:p>
         </p:txBody>
@@ -4539,7 +3972,7 @@
               </a:defRPr>
             </a:pPr>
             <a:r>
-              <a:t>2. JSON 로더 구현</a:t>
+              <a:t>2. Phase 5 iOS + Web: build + PWA + deploy test</a:t>
             </a:r>
           </a:p>
         </p:txBody>
@@ -4575,7 +4008,7 @@
               </a:defRPr>
             </a:pPr>
             <a:r>
-              <a:t>3. 기본 성경 읽기 UI (Phase 2)</a:t>
+              <a:t>3. Hymns 100+곡: CSV import via downloader.py</a:t>
             </a:r>
           </a:p>
         </p:txBody>
@@ -4611,14 +4044,50 @@
               </a:defRPr>
             </a:pPr>
             <a:r>
-              <a:t>4. Windows 앱 실행 테스트</a:t>
-            </a:r>
-          </a:p>
-        </p:txBody>
-      </p:sp>
-      <p:sp>
-        <p:nvSpPr>
-          <p:cNvPr id="15" name="Rounded Rectangle 14"/>
+              <a:t>4. creed/lords/responsive_reading: responsive + Semantics</a:t>
+            </a:r>
+          </a:p>
+        </p:txBody>
+      </p:sp>
+      <p:sp>
+        <p:nvSpPr>
+          <p:cNvPr id="15" name="TextBox 14"/>
+          <p:cNvSpPr txBox="1"/>
+          <p:nvPr/>
+        </p:nvSpPr>
+        <p:spPr>
+          <a:xfrm>
+            <a:off x="4754880" y="2624327"/>
+            <a:ext cx="3931920" cy="365760"/>
+          </a:xfrm>
+          <a:prstGeom prst="rect">
+            <a:avLst/>
+          </a:prstGeom>
+          <a:noFill/>
+        </p:spPr>
+        <p:txBody>
+          <a:bodyPr wrap="square">
+            <a:spAutoFit/>
+          </a:bodyPr>
+          <a:lstStyle/>
+          <a:p>
+            <a:pPr algn="l">
+              <a:defRPr sz="1200" b="0">
+                <a:solidFill>
+                  <a:srgbClr val="1E293B"/>
+                </a:solidFill>
+                <a:latin typeface="Malgun Gothic"/>
+              </a:defRPr>
+            </a:pPr>
+            <a:r>
+              <a:t>5. Store assets: screenshots + listing text 준비</a:t>
+            </a:r>
+          </a:p>
+        </p:txBody>
+      </p:sp>
+      <p:sp>
+        <p:nvSpPr>
+          <p:cNvPr id="16" name="Rounded Rectangle 15"/>
           <p:cNvSpPr/>
           <p:nvPr/>
         </p:nvSpPr>
@@ -4661,7 +4130,7 @@
       </p:sp>
       <p:sp>
         <p:nvSpPr>
-          <p:cNvPr id="16" name="TextBox 15"/>
+          <p:cNvPr id="17" name="TextBox 16"/>
           <p:cNvSpPr txBox="1"/>
           <p:nvPr/>
         </p:nvSpPr>
@@ -4690,7 +4159,7 @@
               </a:defRPr>
             </a:pPr>
             <a:r>
-              <a:t>로드맵 문서: docs/Project_Status_and_Updated_Roadmap_2026-06-19.md (~88% 완료)</a:t>
+              <a:t>로드맵 문서: docs/Project_Status_and_Updated_Roadmap_2026-06-19.md (~85% 완료)</a:t>
             </a:r>
             <a:br/>
             <a:r>
@@ -5088,7 +4557,7 @@
               </a:defRPr>
             </a:pPr>
             <a:r>
-              <a:t>전체 로드맵 진행률: ~65% 완료 (Phase 0-3 ✅ | Phase 4 ⏳)</a:t>
+              <a:t>전체 로드맵 진행률: ~85% 완료 (hymns 35곡 | responsive 9 screens)</a:t>
             </a:r>
           </a:p>
         </p:txBody>
@@ -5145,7 +4614,7 @@
         <p:spPr>
           <a:xfrm>
             <a:off x="457200" y="1280160"/>
-            <a:ext cx="5349240" cy="228600"/>
+            <a:ext cx="6995159" cy="228600"/>
           </a:xfrm>
           <a:prstGeom prst="rect">
             <a:avLst/>
@@ -5210,7 +4679,7 @@
               </a:defRPr>
             </a:pPr>
             <a:r>
-              <a:t>Phase별: 0-3 ██████ 95% | 4 ░░░░ 10% | 5 ░░░░ 0%</a:t>
+              <a:t>Phase별: 0-3 100% ✅ | 4 ~80% ⏳ | 5 ~10% ⏳ | branding ✅</a:t>
             </a:r>
           </a:p>
         </p:txBody>
@@ -5223,8 +4692,8 @@
         </p:nvSpPr>
         <p:spPr>
           <a:xfrm>
-            <a:off x="457200" y="1737360"/>
-            <a:ext cx="8229600" cy="2926080"/>
+            <a:off x="457200" y="1783080"/>
+            <a:ext cx="8229600" cy="3108960"/>
           </a:xfrm>
           <a:prstGeom prst="rect">
             <a:avLst/>
@@ -5245,37 +4714,33 @@
               </a:defRPr>
             </a:pPr>
             <a:r>
-              <a:t>✅ 완료된 상태 (전체 로드맵 대비 ~65%)</a:t>
+              <a:t>✅ 완료된 상태 (~85% , hymns 35곡)</a:t>
             </a:r>
             <a:br/>
             <a:r>
-              <a:t>• Phase 0-2: 기반 + 데이터 + 기본 읽기 UI (bilingual 검색, compact grid, home nav) ✅</a:t>
+              <a:t>- Phase 0-2: 전체 데이터 (모델, Hive 어댑터, JSON 로더, BibleDataService), 기본 읽기 (book_list bilingual/search/filter, chapter grid, verse viewer RichText + prev/next/home)</a:t>
             </a:r>
             <a:br/>
             <a:r>
-              <a:t>• Phase 3: 북마크, 찬송가(검색+즐겨찾기), 신경/기도/교독문 dual, About, BottomNav, 다크+글꼴+highContrast ✅</a:t>
+              <a:t>- Phase 3: 북마크 (full CRUD + Hive + viewer toggle + list), hymns (35 PD + downloader.py + search/fav/detail + metadata), worship (creed/prayer/responsive dual), About, 5탭 BottomNav, ThemeProvider (dark/scale/highContrast)</a:t>
+            </a:r>
+            <a:br/>
+            <a:r>
+              <a:t>- Phase 4: Branding </a:t>
             </a:r>
             <a:br/>
             <a:br/>
             <a:r>
-              <a:t>⏳ 당장 다음 할 일 (상세 범위, &lt;1주, Top 3)</a:t>
+              <a:t>⏳ 당장 다음 할 일 (Top, &lt;1-2주)</a:t>
             </a:r>
             <a:br/>
             <a:r>
-              <a:t>1. 즐겨찾기 하이라이트 기능 (목록/본문 강조)</a:t>
-            </a:r>
-            <a:br/>
-            <a:r>
-              <a:t>2. Phase 4: dark polish, full responsive, accessibility</a:t>
-            </a:r>
-            <a:br/>
-            <a:r>
-              <a:t>3. Loading/error full + branding (icon/splash)</a:t>
+              <a:t>전체 대비 남은 ~15% (주로 Phase 5 + Phase 4 잔여)**</a:t>
             </a:r>
             <a:br/>
             <a:br/>
             <a:r>
-              <a:t>남은 것: Phase 4 (고도화), Phase 5 (배포) - 상세 Gantt는 별도 슬라이드</a:t>
+              <a:t>남은 것: Phase 5 (크로스 플랫폼 빌드/스토어) - 상세 Gantt 별도 슬라이드</a:t>
             </a:r>
           </a:p>
         </p:txBody>
@@ -6712,7 +6177,7 @@
               </a:defRPr>
             </a:pPr>
             <a:r>
-              <a:t>• M2: Phase 3 완료 (기능+콘텐츠) - 2026-07-04 ✅</a:t>
+              <a:t>• M2: Phase 3 완료 (북마크 + hymns 35곡) - 2026-07-04 ✅</a:t>
             </a:r>
           </a:p>
         </p:txBody>
@@ -6748,7 +6213,7 @@
               </a:defRPr>
             </a:pPr>
             <a:r>
-              <a:t>• M3: Phase 4 완료 (고도화 + 35 hymns) - 2026-07-11</a:t>
+              <a:t>• M3: Phase 4 완료 (Branding + Resp + Access + Scroll) - 2026-07-11</a:t>
             </a:r>
           </a:p>
         </p:txBody>
@@ -6784,7 +6249,7 @@
               </a:defRPr>
             </a:pPr>
             <a:r>
-              <a:t>• M4: Phase 5 완료 (빌드/릴리스) - 2026-07-25</a:t>
+              <a:t>• M4: Phase 5 완료 (Android/iOS/Web + Store) - 2026-07-25</a:t>
             </a:r>
           </a:p>
         </p:txBody>
@@ -6820,7 +6285,7 @@
               </a:defRPr>
             </a:pPr>
             <a:r>
-              <a:t>• M5: 스토어 배포 - 2026-08-05</a:t>
+              <a:t>• M5: 스토어 릴리스 - 2026-08-05</a:t>
             </a:r>
           </a:p>
         </p:txBody>
@@ -6905,8 +6370,8 @@
         </p:nvSpPr>
         <p:spPr>
           <a:xfrm>
-            <a:off x="4754880" y="1417320"/>
-            <a:ext cx="2331720" cy="292608"/>
+            <a:off x="4754880" y="1371600"/>
+            <a:ext cx="2194560" cy="256032"/>
           </a:xfrm>
           <a:prstGeom prst="rect">
             <a:avLst/>
@@ -6948,8 +6413,8 @@
         </p:nvSpPr>
         <p:spPr>
           <a:xfrm>
-            <a:off x="4800600" y="1463040"/>
-            <a:ext cx="2240279" cy="228600"/>
+            <a:off x="4773168" y="1389888"/>
+            <a:ext cx="2157984" cy="219456"/>
           </a:xfrm>
           <a:prstGeom prst="rect">
             <a:avLst/>
@@ -6963,7 +6428,7 @@
           <a:lstStyle/>
           <a:p>
             <a:pPr algn="l">
-              <a:defRPr sz="900" b="1">
+              <a:defRPr sz="700" b="1">
                 <a:solidFill>
                   <a:srgbClr val="FFFFFF"/>
                 </a:solidFill>
@@ -6971,7 +6436,7 @@
               </a:defRPr>
             </a:pPr>
             <a:r>
-              <a:t>P0-2 (기반+읽기UI)</a:t>
+              <a:t>P0-2 (기반+UI)</a:t>
             </a:r>
           </a:p>
         </p:txBody>
@@ -6984,8 +6449,8 @@
         </p:nvSpPr>
         <p:spPr>
           <a:xfrm>
-            <a:off x="7086600" y="1828800"/>
-            <a:ext cx="1165860" cy="292608"/>
+            <a:off x="6949440" y="1691640"/>
+            <a:ext cx="1097280" cy="256032"/>
           </a:xfrm>
           <a:prstGeom prst="rect">
             <a:avLst/>
@@ -7027,8 +6492,8 @@
         </p:nvSpPr>
         <p:spPr>
           <a:xfrm>
-            <a:off x="7132320" y="1874519"/>
-            <a:ext cx="1074419" cy="228600"/>
+            <a:off x="6967728" y="1709928"/>
+            <a:ext cx="1060704" cy="219456"/>
           </a:xfrm>
           <a:prstGeom prst="rect">
             <a:avLst/>
@@ -7042,7 +6507,7 @@
           <a:lstStyle/>
           <a:p>
             <a:pPr algn="l">
-              <a:defRPr sz="900" b="1">
+              <a:defRPr sz="700" b="1">
                 <a:solidFill>
                   <a:srgbClr val="FFFFFF"/>
                 </a:solidFill>
@@ -7063,8 +6528,8 @@
         </p:nvSpPr>
         <p:spPr>
           <a:xfrm>
-            <a:off x="8252460" y="2240280"/>
-            <a:ext cx="1943100" cy="292608"/>
+            <a:off x="8046720" y="2011680"/>
+            <a:ext cx="1828800" cy="256032"/>
           </a:xfrm>
           <a:prstGeom prst="rect">
             <a:avLst/>
@@ -7106,8 +6571,8 @@
         </p:nvSpPr>
         <p:spPr>
           <a:xfrm>
-            <a:off x="8298180" y="2286000"/>
-            <a:ext cx="1851660" cy="228600"/>
+            <a:off x="8065008" y="2029968"/>
+            <a:ext cx="1792224" cy="219456"/>
           </a:xfrm>
           <a:prstGeom prst="rect">
             <a:avLst/>
@@ -7121,7 +6586,7 @@
           <a:lstStyle/>
           <a:p>
             <a:pPr algn="l">
-              <a:defRPr sz="900" b="1">
+              <a:defRPr sz="700" b="1">
                 <a:solidFill>
                   <a:srgbClr val="FFFFFF"/>
                 </a:solidFill>
@@ -7129,7 +6594,7 @@
               </a:defRPr>
             </a:pPr>
             <a:r>
-              <a:t>P4 (Branding+35 hymns+Resp+Access+Scroll)</a:t>
+              <a:t>P4 (Branding+35hymns+Resp+Access+Scroll)</a:t>
             </a:r>
           </a:p>
         </p:txBody>
@@ -7142,8 +6607,8 @@
         </p:nvSpPr>
         <p:spPr>
           <a:xfrm>
-            <a:off x="10195560" y="2651760"/>
-            <a:ext cx="777240" cy="292608"/>
+            <a:off x="9875520" y="2331720"/>
+            <a:ext cx="731520" cy="256032"/>
           </a:xfrm>
           <a:prstGeom prst="rect">
             <a:avLst/>
@@ -7185,8 +6650,8 @@
         </p:nvSpPr>
         <p:spPr>
           <a:xfrm>
-            <a:off x="10241280" y="2697480"/>
-            <a:ext cx="685800" cy="228600"/>
+            <a:off x="9893808" y="2350008"/>
+            <a:ext cx="694944" cy="219456"/>
           </a:xfrm>
           <a:prstGeom prst="rect">
             <a:avLst/>
@@ -7200,7 +6665,7 @@
           <a:lstStyle/>
           <a:p>
             <a:pPr algn="l">
-              <a:defRPr sz="900" b="1">
+              <a:defRPr sz="700" b="1">
                 <a:solidFill>
                   <a:srgbClr val="FFFFFF"/>
                 </a:solidFill>
@@ -7208,7 +6673,7 @@
               </a:defRPr>
             </a:pPr>
             <a:r>
-              <a:t>P4 잔여 (CSV 100+ + Polish)</a:t>
+              <a:t>P4c (CSV+Semantics+Polish)</a:t>
             </a:r>
           </a:p>
         </p:txBody>
@@ -7221,8 +6686,8 @@
         </p:nvSpPr>
         <p:spPr>
           <a:xfrm>
-            <a:off x="10972800" y="3063240"/>
-            <a:ext cx="2331720" cy="292608"/>
+            <a:off x="10607040" y="2651760"/>
+            <a:ext cx="1828800" cy="256032"/>
           </a:xfrm>
           <a:prstGeom prst="rect">
             <a:avLst/>
@@ -7264,8 +6729,8 @@
         </p:nvSpPr>
         <p:spPr>
           <a:xfrm>
-            <a:off x="11018520" y="3108960"/>
-            <a:ext cx="2240279" cy="228600"/>
+            <a:off x="10625328" y="2670048"/>
+            <a:ext cx="1792224" cy="219456"/>
           </a:xfrm>
           <a:prstGeom prst="rect">
             <a:avLst/>
@@ -7279,7 +6744,7 @@
           <a:lstStyle/>
           <a:p>
             <a:pPr algn="l">
-              <a:defRPr sz="900" b="1">
+              <a:defRPr sz="700" b="1">
                 <a:solidFill>
                   <a:srgbClr val="FFFFFF"/>
                 </a:solidFill>
@@ -7287,7 +6752,7 @@
               </a:defRPr>
             </a:pPr>
             <a:r>
-              <a:t>P5 (빌드 + Store)</a:t>
+              <a:t>P5 (빌드+Store)</a:t>
             </a:r>
           </a:p>
         </p:txBody>
@@ -7300,8 +6765,8 @@
         </p:nvSpPr>
         <p:spPr>
           <a:xfrm>
-            <a:off x="457200" y="4114800"/>
-            <a:ext cx="8229600" cy="731520"/>
+            <a:off x="457200" y="4206240"/>
+            <a:ext cx="8229600" cy="457200"/>
           </a:xfrm>
           <a:prstGeom prst="rect">
             <a:avLst/>
@@ -7315,7 +6780,7 @@
           <a:lstStyle/>
           <a:p>
             <a:pPr algn="l">
-              <a:defRPr sz="1100" b="0">
+              <a:defRPr sz="900" b="0">
                 <a:solidFill>
                   <a:srgbClr val="1E293B"/>
                 </a:solidFill>
@@ -7323,7 +6788,7 @@
               </a:defRPr>
             </a:pPr>
             <a:r>
-              <a:t>✅ = 완료   |   Gantt 바: Phase 기간 (주 단위)   |   hymns: 35곡 PD   |   Updated 2026-07-04</a:t>
+              <a:t>✅ 완료 | ⏳ 진행 | Gantt 주 단위 | 35 hymns | 2026-07-04</a:t>
             </a:r>
           </a:p>
         </p:txBody>
@@ -7463,7 +6928,7 @@
               </a:defRPr>
             </a:pPr>
             <a:r>
-              <a:t>Phase 1: 데이터 계층 (최우선)</a:t>
+              <a:t>Phase 1: 데이터 계층 (완료, 2026-07-04)</a:t>
             </a:r>
           </a:p>
         </p:txBody>
